--- a/presentacion/Lia-Defensa.pptx
+++ b/presentacion/Lia-Defensa.pptx
@@ -11855,7 +11855,7 @@
                 <a:ea typeface="Calibri" pitchFamily="34" charset="-122"/>
                 <a:cs typeface="Calibri" pitchFamily="34" charset="-120"/>
               </a:rPr>
-              <a:t>Claude interpreta el lenguaje natural y ejecuta acciones reales, no solo genera texto.</a:t>
+              <a:t>Lia interpreta el lenguaje natural y ejecuta acciones reales, no solo genera texto.</a:t>
             </a:r>
             <a:endParaRPr lang="en-US" sz="1250" dirty="0"/>
           </a:p>
